--- a/backend/assets/client-templates/neom/default-master.pptx
+++ b/backend/assets/client-templates/neom/default-master.pptx
@@ -132,50 +132,6 @@
           <a:chExt cx="0" cy="0"/>
         </a:xfrm>
       </p:grpSpPr>
-      <p:graphicFrame>
-        <p:nvGraphicFramePr>
-          <p:cNvPr id="3" name="think-cell data - do not delete" hidden="1">
-            <a:extLst>
-              <a:ext uri="{FF2B5EF4-FFF2-40B4-BE49-F238E27FC236}">
-                <a16:creationId xmlns:a16="http://schemas.microsoft.com/office/drawing/2014/main" id="{ECCA27AF-8155-44B8-3764-DA048423AAB0}"/>
-              </a:ext>
-            </a:extLst>
-          </p:cNvPr>
-          <p:cNvGraphicFramePr>
-            <a:graphicFrameLocks noChangeAspect="1"/>
-          </p:cNvGraphicFramePr>
-          <p:nvPr userDrawn="1">
-            <p:custDataLst>
-              <p:tags r:id="rId1"/>
-            </p:custDataLst>
-            <p:extLst>
-              <p:ext uri="{D42A27DB-BD31-4B8C-83A1-F6EECF244321}">
-                <p14:modId xmlns:p14="http://schemas.microsoft.com/office/powerpoint/2010/main" val="1870341505"/>
-              </p:ext>
-            </p:extLst>
-          </p:nvPr>
-        </p:nvGraphicFramePr>
-        <p:xfrm>
-          <a:off x="1588" y="1588"/>
-          <a:ext cx="1588" cy="1588"/>
-        </p:xfrm>
-        <a:graphic>
-          <a:graphicData uri="http://schemas.openxmlformats.org/presentationml/2006/ole">
-            <mc:AlternateContent xmlns:mc="http://schemas.openxmlformats.org/markup-compatibility/2006">
-              <mc:Choice xmlns:v="urn:schemas-microsoft-com:vml" Requires="v">
-                <p:oleObj name="think-cell Slide" r:id="rId3" imgW="327" imgH="327" progId="TCLayout.ActiveDocument.1">
-                  <p:embed/>
-                </p:oleObj>
-              </mc:Choice>
-              <mc:Fallback>
-                <p:oleObj name="think-cell Slide" r:id="rId3" imgW="327" imgH="327" progId="TCLayout.ActiveDocument.1">
-                  <p:embed/>
-                </p:oleObj>
-              </mc:Fallback>
-            </mc:AlternateContent>
-          </a:graphicData>
-        </a:graphic>
-      </p:graphicFrame>
       <p:pic>
         <p:nvPicPr>
           <p:cNvPr id="8" name="NEOM Logo">
@@ -431,50 +387,6 @@
           <a:chExt cx="0" cy="0"/>
         </a:xfrm>
       </p:grpSpPr>
-      <p:graphicFrame>
-        <p:nvGraphicFramePr>
-          <p:cNvPr id="11" name="think-cell data - do not delete" hidden="1">
-            <a:extLst>
-              <a:ext uri="{FF2B5EF4-FFF2-40B4-BE49-F238E27FC236}">
-                <a16:creationId xmlns:a16="http://schemas.microsoft.com/office/drawing/2014/main" id="{F5ED6F6A-2617-53B1-6C59-A184FF4AB012}"/>
-              </a:ext>
-            </a:extLst>
-          </p:cNvPr>
-          <p:cNvGraphicFramePr>
-            <a:graphicFrameLocks noChangeAspect="1"/>
-          </p:cNvGraphicFramePr>
-          <p:nvPr userDrawn="1">
-            <p:custDataLst>
-              <p:tags r:id="rId41"/>
-            </p:custDataLst>
-            <p:extLst>
-              <p:ext uri="{D42A27DB-BD31-4B8C-83A1-F6EECF244321}">
-                <p14:modId xmlns:p14="http://schemas.microsoft.com/office/powerpoint/2010/main" val="2149342750"/>
-              </p:ext>
-            </p:extLst>
-          </p:nvPr>
-        </p:nvGraphicFramePr>
-        <p:xfrm>
-          <a:off x="1588" y="1588"/>
-          <a:ext cx="1588" cy="1588"/>
-        </p:xfrm>
-        <a:graphic>
-          <a:graphicData uri="http://schemas.openxmlformats.org/presentationml/2006/ole">
-            <mc:AlternateContent xmlns:mc="http://schemas.openxmlformats.org/markup-compatibility/2006">
-              <mc:Choice xmlns:v="urn:schemas-microsoft-com:vml" Requires="v">
-                <p:oleObj name="think-cell Slide" r:id="rId42" imgW="484" imgH="486" progId="TCLayout.ActiveDocument.1">
-                  <p:embed/>
-                </p:oleObj>
-              </mc:Choice>
-              <mc:Fallback>
-                <p:oleObj name="think-cell Slide" r:id="rId42" imgW="484" imgH="486" progId="TCLayout.ActiveDocument.1">
-                  <p:embed/>
-                </p:oleObj>
-              </mc:Fallback>
-            </mc:AlternateContent>
-          </a:graphicData>
-        </a:graphic>
-      </p:graphicFrame>
       <p:pic>
         <p:nvPicPr>
           <p:cNvPr id="10" name="Picture 9">
@@ -1328,18 +1240,6 @@
 </p:sldMaster>
 </file>
 
-<file path=ppt/tags/tag1.xml><?xml version="1.0" encoding="utf-8"?>
-<p:tagLst xmlns:a="http://schemas.openxmlformats.org/drawingml/2006/main" xmlns:r="http://schemas.openxmlformats.org/officeDocument/2006/relationships" xmlns:p="http://schemas.openxmlformats.org/presentationml/2006/main">
-  <p:tag name="THINKCELLSHAPEDONOTDELETE" val="thinkcellActiveDocDoNotDelete"/>
-</p:tagLst>
-</file>
-
-<file path=ppt/tags/tag19.xml><?xml version="1.0" encoding="utf-8"?>
-<p:tagLst xmlns:a="http://schemas.openxmlformats.org/drawingml/2006/main" xmlns:r="http://schemas.openxmlformats.org/officeDocument/2006/relationships" xmlns:p="http://schemas.openxmlformats.org/presentationml/2006/main">
-  <p:tag name="THINKCELLSHAPEDONOTDELETE" val="thinkcellActiveDocDoNotDelete"/>
-</p:tagLst>
-</file>
-
 <file path=ppt/theme/theme1.xml><?xml version="1.0" encoding="utf-8"?>
 <a:theme xmlns:a="http://schemas.openxmlformats.org/drawingml/2006/main" name="1_NEOM Master Theme 2022">
   <a:themeElements>
@@ -1710,10 +1610,4 @@
     </a:ext>
   </a:extLst>
 </a:theme>
-</file>
-
-<file path=docMetadata/LabelInfo.xml><?xml version="1.0" encoding="utf-8"?>
-<clbl:labelList xmlns:clbl="http://schemas.microsoft.com/office/2020/mipLabelMetadata">
-  <clbl:label id="{f16980e5-fcb5-4d6d-84e8-56f3ce2377d4}" enabled="1" method="Privileged" siteId="{8288fdf2-0e8b-47a6-abbb-004395ecab56}" removed="0"/>
-</clbl:labelList>
 </file>